--- a/assets/powerpoints/module-vetements/B3-decrire-un-vetement.pptx
+++ b/assets/powerpoints/module-vetements/B3-decrire-un-vetement.pptx
@@ -11562,7 +11562,97 @@
                 </a:solidFill>
                 <a:latin typeface="Verdana"/>
               </a:rPr>
-              <a:t>C'est la règle générale du français, et elle vaut pour toutes les couleurs et toutes les matières. Quelques adjectifs très courants font exception — &lt;b&gt;beau&lt;/b&gt;, &lt;b&gt;grand&lt;/b&gt;, &lt;b&gt;petit&lt;/b&gt;, &lt;b&gt;gros&lt;/b&gt;, &lt;b&gt;nouveau&lt;/b&gt; — et se placent avant : « un beau manteau », « une petite veste ».</a:t>
+              <a:t>C'est la règle générale du français, et elle vaut pour toutes les couleurs et toutes les matières. Quelques adjectifs très courants font exception — </a:t>
+            </a:r>
+            <a:r>
+              <a:rPr sz="2000" b="1" i="0">
+                <a:solidFill>
+                  <a:srgbClr val="4B4F52"/>
+                </a:solidFill>
+                <a:latin typeface="Verdana"/>
+              </a:rPr>
+              <a:t>beau</a:t>
+            </a:r>
+            <a:r>
+              <a:rPr sz="2000" b="0" i="0">
+                <a:solidFill>
+                  <a:srgbClr val="4B4F52"/>
+                </a:solidFill>
+                <a:latin typeface="Verdana"/>
+              </a:rPr>
+              <a:t>, </a:t>
+            </a:r>
+            <a:r>
+              <a:rPr sz="2000" b="1" i="0">
+                <a:solidFill>
+                  <a:srgbClr val="4B4F52"/>
+                </a:solidFill>
+                <a:latin typeface="Verdana"/>
+              </a:rPr>
+              <a:t>grand</a:t>
+            </a:r>
+            <a:r>
+              <a:rPr sz="2000" b="0" i="0">
+                <a:solidFill>
+                  <a:srgbClr val="4B4F52"/>
+                </a:solidFill>
+                <a:latin typeface="Verdana"/>
+              </a:rPr>
+              <a:t>, </a:t>
+            </a:r>
+            <a:r>
+              <a:rPr sz="2000" b="1" i="0">
+                <a:solidFill>
+                  <a:srgbClr val="4B4F52"/>
+                </a:solidFill>
+                <a:latin typeface="Verdana"/>
+              </a:rPr>
+              <a:t>petit</a:t>
+            </a:r>
+            <a:r>
+              <a:rPr sz="2000" b="0" i="0">
+                <a:solidFill>
+                  <a:srgbClr val="4B4F52"/>
+                </a:solidFill>
+                <a:latin typeface="Verdana"/>
+              </a:rPr>
+              <a:t>, </a:t>
+            </a:r>
+            <a:r>
+              <a:rPr sz="2000" b="1" i="0">
+                <a:solidFill>
+                  <a:srgbClr val="4B4F52"/>
+                </a:solidFill>
+                <a:latin typeface="Verdana"/>
+              </a:rPr>
+              <a:t>gros</a:t>
+            </a:r>
+            <a:r>
+              <a:rPr sz="2000" b="0" i="0">
+                <a:solidFill>
+                  <a:srgbClr val="4B4F52"/>
+                </a:solidFill>
+                <a:latin typeface="Verdana"/>
+              </a:rPr>
+              <a:t>, </a:t>
+            </a:r>
+            <a:r>
+              <a:rPr sz="2000" b="1" i="0">
+                <a:solidFill>
+                  <a:srgbClr val="4B4F52"/>
+                </a:solidFill>
+                <a:latin typeface="Verdana"/>
+              </a:rPr>
+              <a:t>nouveau</a:t>
+            </a:r>
+            <a:r>
+              <a:rPr sz="2000" b="0" i="0">
+                <a:solidFill>
+                  <a:srgbClr val="4B4F52"/>
+                </a:solidFill>
+                <a:latin typeface="Verdana"/>
+              </a:rPr>
+              <a:t> — et se placent avant : « un beau manteau », « une petite veste ».</a:t>
             </a:r>
           </a:p>
         </p:txBody>
